--- a/LabBook_20.pptx
+++ b/LabBook_20.pptx
@@ -817,7 +817,7 @@
           <a:p>
             <a:fld id="{8438F8DC-35B0-48E6-A86E-42F1F08DD00F}" type="datetimeFigureOut">
               <a:rPr lang="es-ES" smtClean="0"/>
-              <a:t>01/03/2026</a:t>
+              <a:t>10/03/2026</a:t>
             </a:fld>
             <a:endParaRPr lang="es-ES"/>
           </a:p>
@@ -994,7 +994,7 @@
           <a:p>
             <a:fld id="{FACBDC12-F39B-4B97-8F4D-6734F9D366FF}" type="datetimeFigureOut">
               <a:rPr lang="es-ES" smtClean="0"/>
-              <a:t>01/03/2026</a:t>
+              <a:t>10/03/2026</a:t>
             </a:fld>
             <a:endParaRPr lang="es-ES"/>
           </a:p>
@@ -10403,6 +10403,36 @@
           </a:prstGeom>
         </p:spPr>
       </p:pic>
+      <p:pic>
+        <p:nvPicPr>
+          <p:cNvPr id="5" name="Imagen 4">
+            <a:extLst>
+              <a:ext uri="{FF2B5EF4-FFF2-40B4-BE49-F238E27FC236}">
+                <a16:creationId xmlns:a16="http://schemas.microsoft.com/office/drawing/2014/main" id="{08A8C6FD-A996-B508-D1EB-E8F1651B4E1A}"/>
+              </a:ext>
+            </a:extLst>
+          </p:cNvPr>
+          <p:cNvPicPr>
+            <a:picLocks noChangeAspect="1"/>
+          </p:cNvPicPr>
+          <p:nvPr/>
+        </p:nvPicPr>
+        <p:blipFill>
+          <a:blip r:embed="rId6"/>
+          <a:stretch>
+            <a:fillRect/>
+          </a:stretch>
+        </p:blipFill>
+        <p:spPr>
+          <a:xfrm>
+            <a:off x="4267200" y="1366114"/>
+            <a:ext cx="5400675" cy="4333875"/>
+          </a:xfrm>
+          <a:prstGeom prst="rect">
+            <a:avLst/>
+          </a:prstGeom>
+        </p:spPr>
+      </p:pic>
     </p:spTree>
     <p:extLst>
       <p:ext uri="{BB962C8B-B14F-4D97-AF65-F5344CB8AC3E}">
@@ -12009,6 +12039,66 @@
           </a:p>
         </p:txBody>
       </p:sp>
+      <p:pic>
+        <p:nvPicPr>
+          <p:cNvPr id="5" name="Imagen 4">
+            <a:extLst>
+              <a:ext uri="{FF2B5EF4-FFF2-40B4-BE49-F238E27FC236}">
+                <a16:creationId xmlns:a16="http://schemas.microsoft.com/office/drawing/2014/main" id="{E2A99EFC-E5CA-590E-2B52-FD574C14E411}"/>
+              </a:ext>
+            </a:extLst>
+          </p:cNvPr>
+          <p:cNvPicPr>
+            <a:picLocks noChangeAspect="1"/>
+          </p:cNvPicPr>
+          <p:nvPr/>
+        </p:nvPicPr>
+        <p:blipFill>
+          <a:blip r:embed="rId5"/>
+          <a:stretch>
+            <a:fillRect/>
+          </a:stretch>
+        </p:blipFill>
+        <p:spPr>
+          <a:xfrm>
+            <a:off x="572781" y="1752600"/>
+            <a:ext cx="5381625" cy="2219325"/>
+          </a:xfrm>
+          <a:prstGeom prst="rect">
+            <a:avLst/>
+          </a:prstGeom>
+        </p:spPr>
+      </p:pic>
+      <p:pic>
+        <p:nvPicPr>
+          <p:cNvPr id="15" name="Imagen 14">
+            <a:extLst>
+              <a:ext uri="{FF2B5EF4-FFF2-40B4-BE49-F238E27FC236}">
+                <a16:creationId xmlns:a16="http://schemas.microsoft.com/office/drawing/2014/main" id="{6279227B-1523-EB59-B17B-6A691B0337B9}"/>
+              </a:ext>
+            </a:extLst>
+          </p:cNvPr>
+          <p:cNvPicPr>
+            <a:picLocks noChangeAspect="1"/>
+          </p:cNvPicPr>
+          <p:nvPr/>
+        </p:nvPicPr>
+        <p:blipFill>
+          <a:blip r:embed="rId6"/>
+          <a:stretch>
+            <a:fillRect/>
+          </a:stretch>
+        </p:blipFill>
+        <p:spPr>
+          <a:xfrm>
+            <a:off x="7420927" y="1606536"/>
+            <a:ext cx="3781425" cy="2847975"/>
+          </a:xfrm>
+          <a:prstGeom prst="rect">
+            <a:avLst/>
+          </a:prstGeom>
+        </p:spPr>
+      </p:pic>
     </p:spTree>
     <p:extLst>
       <p:ext uri="{BB962C8B-B14F-4D97-AF65-F5344CB8AC3E}">
@@ -12463,6 +12553,66 @@
           </a:p>
         </p:txBody>
       </p:sp>
+      <p:pic>
+        <p:nvPicPr>
+          <p:cNvPr id="5" name="Imagen 4">
+            <a:extLst>
+              <a:ext uri="{FF2B5EF4-FFF2-40B4-BE49-F238E27FC236}">
+                <a16:creationId xmlns:a16="http://schemas.microsoft.com/office/drawing/2014/main" id="{328DD6DC-CBD5-2402-2C87-4BEBF7D66081}"/>
+              </a:ext>
+            </a:extLst>
+          </p:cNvPr>
+          <p:cNvPicPr>
+            <a:picLocks noChangeAspect="1"/>
+          </p:cNvPicPr>
+          <p:nvPr/>
+        </p:nvPicPr>
+        <p:blipFill>
+          <a:blip r:embed="rId5"/>
+          <a:stretch>
+            <a:fillRect/>
+          </a:stretch>
+        </p:blipFill>
+        <p:spPr>
+          <a:xfrm>
+            <a:off x="482522" y="1294585"/>
+            <a:ext cx="5381625" cy="2238375"/>
+          </a:xfrm>
+          <a:prstGeom prst="rect">
+            <a:avLst/>
+          </a:prstGeom>
+        </p:spPr>
+      </p:pic>
+      <p:pic>
+        <p:nvPicPr>
+          <p:cNvPr id="9" name="Imagen 8">
+            <a:extLst>
+              <a:ext uri="{FF2B5EF4-FFF2-40B4-BE49-F238E27FC236}">
+                <a16:creationId xmlns:a16="http://schemas.microsoft.com/office/drawing/2014/main" id="{203E5357-19E8-108E-ABAD-A9410D7AB5C6}"/>
+              </a:ext>
+            </a:extLst>
+          </p:cNvPr>
+          <p:cNvPicPr>
+            <a:picLocks noChangeAspect="1"/>
+          </p:cNvPicPr>
+          <p:nvPr/>
+        </p:nvPicPr>
+        <p:blipFill>
+          <a:blip r:embed="rId6"/>
+          <a:stretch>
+            <a:fillRect/>
+          </a:stretch>
+        </p:blipFill>
+        <p:spPr>
+          <a:xfrm>
+            <a:off x="6629400" y="1013597"/>
+            <a:ext cx="3848100" cy="2800350"/>
+          </a:xfrm>
+          <a:prstGeom prst="rect">
+            <a:avLst/>
+          </a:prstGeom>
+        </p:spPr>
+      </p:pic>
     </p:spTree>
     <p:extLst>
       <p:ext uri="{BB962C8B-B14F-4D97-AF65-F5344CB8AC3E}">
